--- a/발표/트레빗_소개영상용.pptx
+++ b/발표/트레빗_소개영상용.pptx
@@ -1487,7 +1487,7 @@
                 <a:effectLst/>
                 <a:latin typeface="Google Sans Text"/>
               </a:rPr>
-              <a:t>[영상에서는 생략] 3분 안에 담기 위해 건너뜁니다. 대면 발표용으로 남겨 둡니다.</a:t>
+              <a:t>[질의응답 대비 · 팀·확장 계획 질문 나오면] 저희가 푸는 문제는 1인 여행객의 결정 피로와 지역 관광 접근성 부족입니다. 해법은 AI가 완전히 자동으로 결정하고 서프라이즈로 공개하는 것, 여기에 GPS 없이도 체험할 수 있는 데모 모드까지 붙였습니다. 앞으로는 전국으로 넓히고, 지자체 대상 데이터 사업까지 연결할 계획입니다. 팀은 아산스마트팩토리마이스터고 4명입니다 — 저는 AI와 기획, 장한결이 데이터·백엔드, 이승주가 UI/UX와 운영, 이윤호가 QA와 테스트를 맡고 있습니다.</a:t>
             </a:r>
             <a:r>
               <a:rPr lang="ko-KR" altLang="en-US" sz="1600" dirty="0">
@@ -3754,7 +3754,7 @@
                 <a:effectLst/>
                 <a:latin typeface="Google Sans Text"/>
               </a:rPr>
-              <a:t>[영상에서는 생략] 3분 안에 담기 위해 건너뜁니다. 발표 자리에서는 시장 규모 설명에 사용하세요.</a:t>
+              <a:t>[질의응답 대비 · 시장 규모 질문 나오면] 국내 여행 시장 전체는 36조 8천억원이고, 저희가 노리는 1인 여행·데모 모드 시장은 5조원입니다. 3년 안에 그중 1500억, 연매출 200억을 목표로 잡았습니다. 데모 모드 여행 시장 자체가 연평균 24.5퍼센트씩 크고 있다는 게 그 근거입니다.</a:t>
             </a:r>
             <a:r>
               <a:rPr lang="ko-KR" altLang="en-US" sz="1600" dirty="0">
@@ -4210,7 +4210,7 @@
                 <a:effectLst/>
                 <a:latin typeface="Google Sans Text"/>
               </a:rPr>
-              <a:t>[영상에서는 생략] 3분 안에 담기 위해 건너뜁니다. 수익 구조 질문이 나오면 이 장을 펴세요.</a:t>
+              <a:t>[질의응답 대비 · 수익 구조 질문 나오면] 저희는 세 갈래로 봅니다. 첫째는 식당·숙소·체험 예약이 성사될 때마다 받는 정률 수수료 12퍼센트, 둘째는 월 9900원짜리 프리미엄 구독으로 큐레이션 우선순위나 디톡스 리포트를 제공하는 겁니다. 셋째는 지자체나 관광공사에 여행 패턴 데이터를 제공하는 B2G 사업입니다.</a:t>
             </a:r>
             <a:r>
               <a:rPr lang="ko-KR" altLang="en-US" sz="1600" dirty="0">
